--- a/static/teaching/Lecture01Intro.pptx
+++ b/static/teaching/Lecture01Intro.pptx
@@ -5,10 +5,10 @@
     <p:sldMasterId id="2147483888" r:id="rId1"/>
   </p:sldMasterIdLst>
   <p:notesMasterIdLst>
-    <p:notesMasterId r:id="rId50"/>
+    <p:notesMasterId r:id="rId52"/>
   </p:notesMasterIdLst>
   <p:handoutMasterIdLst>
-    <p:handoutMasterId r:id="rId51"/>
+    <p:handoutMasterId r:id="rId53"/>
   </p:handoutMasterIdLst>
   <p:sldIdLst>
     <p:sldId id="256" r:id="rId2"/>
@@ -45,20 +45,22 @@
     <p:sldId id="523" r:id="rId33"/>
     <p:sldId id="341" r:id="rId34"/>
     <p:sldId id="424" r:id="rId35"/>
-    <p:sldId id="342" r:id="rId36"/>
-    <p:sldId id="511" r:id="rId37"/>
-    <p:sldId id="512" r:id="rId38"/>
-    <p:sldId id="514" r:id="rId39"/>
-    <p:sldId id="515" r:id="rId40"/>
-    <p:sldId id="516" r:id="rId41"/>
-    <p:sldId id="517" r:id="rId42"/>
-    <p:sldId id="502" r:id="rId43"/>
-    <p:sldId id="600" r:id="rId44"/>
-    <p:sldId id="503" r:id="rId45"/>
-    <p:sldId id="505" r:id="rId46"/>
-    <p:sldId id="506" r:id="rId47"/>
-    <p:sldId id="507" r:id="rId48"/>
-    <p:sldId id="508" r:id="rId49"/>
+    <p:sldId id="606" r:id="rId36"/>
+    <p:sldId id="342" r:id="rId37"/>
+    <p:sldId id="603" r:id="rId38"/>
+    <p:sldId id="511" r:id="rId39"/>
+    <p:sldId id="512" r:id="rId40"/>
+    <p:sldId id="514" r:id="rId41"/>
+    <p:sldId id="515" r:id="rId42"/>
+    <p:sldId id="516" r:id="rId43"/>
+    <p:sldId id="517" r:id="rId44"/>
+    <p:sldId id="502" r:id="rId45"/>
+    <p:sldId id="600" r:id="rId46"/>
+    <p:sldId id="503" r:id="rId47"/>
+    <p:sldId id="505" r:id="rId48"/>
+    <p:sldId id="506" r:id="rId49"/>
+    <p:sldId id="507" r:id="rId50"/>
+    <p:sldId id="508" r:id="rId51"/>
   </p:sldIdLst>
   <p:sldSz cx="12192000" cy="6858000"/>
   <p:notesSz cx="7315200" cy="9601200"/>
@@ -2003,7 +2005,7 @@
             <a:fld id="{A483BBFF-A031-4291-855E-071C1EC49379}" type="datetimeFigureOut">
               <a:rPr lang="en-US" smtClean="0"/>
               <a:pPr/>
-              <a:t>10/23/2025</a:t>
+              <a:t>8/23/2026</a:t>
             </a:fld>
             <a:endParaRPr lang="en-US"/>
           </a:p>
@@ -2170,7 +2172,7 @@
             <a:fld id="{359DFB19-57B8-4D0A-9A78-D932B0E9D23D}" type="datetimeFigureOut">
               <a:rPr lang="en-US" smtClean="0"/>
               <a:pPr/>
-              <a:t>10/23/2025</a:t>
+              <a:t>8/23/2026</a:t>
             </a:fld>
             <a:endParaRPr lang="en-US"/>
           </a:p>
@@ -2605,7 +2607,7 @@
             <a:fld id="{6A8A1ED9-3D08-4E8F-A333-AC80F87524EA}" type="slidenum">
               <a:rPr lang="en-US" smtClean="0"/>
               <a:pPr/>
-              <a:t>35</a:t>
+              <a:t>36</a:t>
             </a:fld>
             <a:endParaRPr lang="en-US"/>
           </a:p>
@@ -2697,7 +2699,7 @@
             <a:fld id="{6A8A1ED9-3D08-4E8F-A333-AC80F87524EA}" type="slidenum">
               <a:rPr lang="en-US" smtClean="0"/>
               <a:pPr/>
-              <a:t>36</a:t>
+              <a:t>38</a:t>
             </a:fld>
             <a:endParaRPr lang="en-US"/>
           </a:p>
@@ -2789,7 +2791,7 @@
             <a:fld id="{6A8A1ED9-3D08-4E8F-A333-AC80F87524EA}" type="slidenum">
               <a:rPr lang="en-US" smtClean="0"/>
               <a:pPr/>
-              <a:t>37</a:t>
+              <a:t>39</a:t>
             </a:fld>
             <a:endParaRPr lang="en-US"/>
           </a:p>
@@ -2881,7 +2883,7 @@
             <a:fld id="{6A8A1ED9-3D08-4E8F-A333-AC80F87524EA}" type="slidenum">
               <a:rPr lang="en-US" smtClean="0"/>
               <a:pPr/>
-              <a:t>38</a:t>
+              <a:t>40</a:t>
             </a:fld>
             <a:endParaRPr lang="en-US"/>
           </a:p>
@@ -2973,7 +2975,7 @@
             <a:fld id="{6A8A1ED9-3D08-4E8F-A333-AC80F87524EA}" type="slidenum">
               <a:rPr lang="en-US" smtClean="0"/>
               <a:pPr/>
-              <a:t>39</a:t>
+              <a:t>41</a:t>
             </a:fld>
             <a:endParaRPr lang="en-US"/>
           </a:p>
@@ -3065,7 +3067,7 @@
             <a:fld id="{6A8A1ED9-3D08-4E8F-A333-AC80F87524EA}" type="slidenum">
               <a:rPr lang="en-US" smtClean="0"/>
               <a:pPr/>
-              <a:t>41</a:t>
+              <a:t>43</a:t>
             </a:fld>
             <a:endParaRPr lang="en-US"/>
           </a:p>
@@ -3157,7 +3159,7 @@
             <a:fld id="{31F60441-1890-43DC-95FE-67BFE2A4D994}" type="slidenum">
               <a:rPr lang="en-US" smtClean="0"/>
               <a:pPr/>
-              <a:t>42</a:t>
+              <a:t>44</a:t>
             </a:fld>
             <a:endParaRPr lang="en-US"/>
           </a:p>
@@ -3270,7 +3272,7 @@
             <a:fld id="{6A8A1ED9-3D08-4E8F-A333-AC80F87524EA}" type="slidenum">
               <a:rPr lang="en-US" smtClean="0"/>
               <a:pPr/>
-              <a:t>43</a:t>
+              <a:t>45</a:t>
             </a:fld>
             <a:endParaRPr lang="en-US"/>
           </a:p>
@@ -3362,7 +3364,7 @@
             <a:fld id="{31F60441-1890-43DC-95FE-67BFE2A4D994}" type="slidenum">
               <a:rPr lang="en-US" smtClean="0"/>
               <a:pPr/>
-              <a:t>44</a:t>
+              <a:t>46</a:t>
             </a:fld>
             <a:endParaRPr lang="en-US"/>
           </a:p>
@@ -4317,7 +4319,7 @@
             <a:fld id="{BA0F3A29-D35D-45D9-B788-D52E770A0402}" type="datetime1">
               <a:rPr lang="en-US" smtClean="0"/>
               <a:pPr/>
-              <a:t>10/23/2025</a:t>
+              <a:t>8/23/2026</a:t>
             </a:fld>
             <a:endParaRPr lang="en-US"/>
           </a:p>
@@ -4482,7 +4484,7 @@
             <a:fld id="{51AD34F2-5E2D-458F-97B2-AE29B73C4CBE}" type="datetime1">
               <a:rPr lang="en-US" smtClean="0"/>
               <a:pPr/>
-              <a:t>10/23/2025</a:t>
+              <a:t>8/23/2026</a:t>
             </a:fld>
             <a:endParaRPr lang="en-US"/>
           </a:p>
@@ -4657,7 +4659,7 @@
             <a:fld id="{ACD910D5-E2F3-4D01-8A0A-0316AD0199EB}" type="datetime1">
               <a:rPr lang="en-US" smtClean="0"/>
               <a:pPr/>
-              <a:t>10/23/2025</a:t>
+              <a:t>8/23/2026</a:t>
             </a:fld>
             <a:endParaRPr lang="en-US"/>
           </a:p>
@@ -4822,7 +4824,7 @@
             <a:fld id="{FC8B6A49-5686-494D-9F95-7923EB2E93DE}" type="datetime1">
               <a:rPr lang="en-US" smtClean="0"/>
               <a:pPr/>
-              <a:t>10/23/2025</a:t>
+              <a:t>8/23/2026</a:t>
             </a:fld>
             <a:endParaRPr lang="en-US"/>
           </a:p>
@@ -5064,7 +5066,7 @@
             <a:fld id="{746ED2FE-5113-4CD2-9B4F-951B73F4EA2C}" type="datetime1">
               <a:rPr lang="en-US" smtClean="0"/>
               <a:pPr/>
-              <a:t>10/23/2025</a:t>
+              <a:t>8/23/2026</a:t>
             </a:fld>
             <a:endParaRPr lang="en-US"/>
           </a:p>
@@ -5346,7 +5348,7 @@
             <a:fld id="{D939059C-BC64-49D7-AC52-E70DA03AB0B1}" type="datetime1">
               <a:rPr lang="en-US" smtClean="0"/>
               <a:pPr/>
-              <a:t>10/23/2025</a:t>
+              <a:t>8/23/2026</a:t>
             </a:fld>
             <a:endParaRPr lang="en-US"/>
           </a:p>
@@ -5762,7 +5764,7 @@
             <a:fld id="{20911AD0-1144-48A7-891F-85B706DF86FB}" type="datetime1">
               <a:rPr lang="en-US" smtClean="0"/>
               <a:pPr/>
-              <a:t>10/23/2025</a:t>
+              <a:t>8/23/2026</a:t>
             </a:fld>
             <a:endParaRPr lang="en-US"/>
           </a:p>
@@ -5876,7 +5878,7 @@
             <a:fld id="{5B3044C1-12BB-4294-869E-4283CF7A05CC}" type="datetime1">
               <a:rPr lang="en-US" smtClean="0"/>
               <a:pPr/>
-              <a:t>10/23/2025</a:t>
+              <a:t>8/23/2026</a:t>
             </a:fld>
             <a:endParaRPr lang="en-US"/>
           </a:p>
@@ -5968,7 +5970,7 @@
             <a:fld id="{7480B1D0-80A2-4670-92C3-A6D0947CDF4F}" type="datetime1">
               <a:rPr lang="en-US" smtClean="0"/>
               <a:pPr/>
-              <a:t>10/23/2025</a:t>
+              <a:t>8/23/2026</a:t>
             </a:fld>
             <a:endParaRPr lang="en-US"/>
           </a:p>
@@ -6240,7 +6242,7 @@
             <a:fld id="{038DE8CD-4067-45AE-8D5D-33894C9DDA2E}" type="datetime1">
               <a:rPr lang="en-US" smtClean="0"/>
               <a:pPr/>
-              <a:t>10/23/2025</a:t>
+              <a:t>8/23/2026</a:t>
             </a:fld>
             <a:endParaRPr lang="en-US"/>
           </a:p>
@@ -6489,7 +6491,7 @@
             <a:fld id="{60241404-6BC9-4033-9A8E-0CF5F5EF0307}" type="datetime1">
               <a:rPr lang="en-US" smtClean="0"/>
               <a:pPr/>
-              <a:t>10/23/2025</a:t>
+              <a:t>8/23/2026</a:t>
             </a:fld>
             <a:endParaRPr lang="en-US"/>
           </a:p>
@@ -6697,7 +6699,7 @@
             <a:fld id="{EBD3CD76-7482-4D73-921B-369C44C819A5}" type="datetime1">
               <a:rPr lang="en-US" smtClean="0"/>
               <a:pPr/>
-              <a:t>10/23/2025</a:t>
+              <a:t>8/23/2026</a:t>
             </a:fld>
             <a:endParaRPr lang="en-US"/>
           </a:p>
@@ -7235,10 +7237,10 @@
       </p:sp>
       <p:pic>
         <p:nvPicPr>
-          <p:cNvPr id="8" name="Content Placeholder 7" descr="A graph with a line going up&#10;&#10;AI-generated content may be incorrect.">
+          <p:cNvPr id="7" name="Content Placeholder 6">
             <a:extLst>
               <a:ext uri="{FF2B5EF4-FFF2-40B4-BE49-F238E27FC236}">
-                <a16:creationId xmlns:a16="http://schemas.microsoft.com/office/drawing/2014/main" id="{B3699AB3-AA64-EA3F-5C89-FFDD9DF996F7}"/>
+                <a16:creationId xmlns:a16="http://schemas.microsoft.com/office/drawing/2014/main" id="{3DBDEB07-8D4F-64D7-3FD2-5B4E2BDA051A}"/>
               </a:ext>
             </a:extLst>
           </p:cNvPr>
@@ -7263,9 +7265,12 @@
         </p:blipFill>
         <p:spPr>
           <a:xfrm>
-            <a:off x="152400" y="1430759"/>
-            <a:ext cx="11810999" cy="4833659"/>
+            <a:off x="228600" y="1214056"/>
+            <a:ext cx="11506200" cy="5195040"/>
           </a:xfrm>
+          <a:prstGeom prst="rect">
+            <a:avLst/>
+          </a:prstGeom>
         </p:spPr>
       </p:pic>
     </p:spTree>
@@ -7346,10 +7351,10 @@
       </p:sp>
       <p:pic>
         <p:nvPicPr>
-          <p:cNvPr id="12" name="Content Placeholder 11" descr="A graph showing the price of a stock market&#10;&#10;AI-generated content may be incorrect.">
+          <p:cNvPr id="11" name="Content Placeholder 10">
             <a:extLst>
               <a:ext uri="{FF2B5EF4-FFF2-40B4-BE49-F238E27FC236}">
-                <a16:creationId xmlns:a16="http://schemas.microsoft.com/office/drawing/2014/main" id="{E5A4B5CB-B286-E0A9-8098-1EA9C3062D9A}"/>
+                <a16:creationId xmlns:a16="http://schemas.microsoft.com/office/drawing/2014/main" id="{C5ED976E-9098-0A7B-B61C-595E5DDB3DF9}"/>
               </a:ext>
             </a:extLst>
           </p:cNvPr>
@@ -7374,9 +7379,12 @@
         </p:blipFill>
         <p:spPr>
           <a:xfrm>
-            <a:off x="1066800" y="1349812"/>
-            <a:ext cx="10134600" cy="5067280"/>
+            <a:off x="1219200" y="1196253"/>
+            <a:ext cx="10058400" cy="5411974"/>
           </a:xfrm>
+          <a:prstGeom prst="rect">
+            <a:avLst/>
+          </a:prstGeom>
         </p:spPr>
       </p:pic>
     </p:spTree>
@@ -7437,12 +7445,42 @@
           </a:p>
         </p:txBody>
       </p:sp>
+      <p:sp>
+        <p:nvSpPr>
+          <p:cNvPr id="4" name="Slide Number Placeholder 3">
+            <a:extLst>
+              <a:ext uri="{FF2B5EF4-FFF2-40B4-BE49-F238E27FC236}">
+                <a16:creationId xmlns:a16="http://schemas.microsoft.com/office/drawing/2014/main" id="{909C1CC3-90DD-5424-245B-918BE5F30E05}"/>
+              </a:ext>
+            </a:extLst>
+          </p:cNvPr>
+          <p:cNvSpPr>
+            <a:spLocks noGrp="1"/>
+          </p:cNvSpPr>
+          <p:nvPr>
+            <p:ph type="sldNum" sz="quarter" idx="12"/>
+          </p:nvPr>
+        </p:nvSpPr>
+        <p:spPr/>
+        <p:txBody>
+          <a:bodyPr/>
+          <a:lstStyle/>
+          <a:p>
+            <a:fld id="{17E04E7E-C2A2-4357-ABA7-0779A9EE9F17}" type="slidenum">
+              <a:rPr lang="en-US" smtClean="0"/>
+              <a:pPr/>
+              <a:t>12</a:t>
+            </a:fld>
+            <a:endParaRPr lang="en-US"/>
+          </a:p>
+        </p:txBody>
+      </p:sp>
       <p:pic>
         <p:nvPicPr>
-          <p:cNvPr id="14" name="Content Placeholder 13" descr="A graph showing the growth of a company&#10;&#10;AI-generated content may be incorrect.">
+          <p:cNvPr id="7" name="Content Placeholder 6">
             <a:extLst>
               <a:ext uri="{FF2B5EF4-FFF2-40B4-BE49-F238E27FC236}">
-                <a16:creationId xmlns:a16="http://schemas.microsoft.com/office/drawing/2014/main" id="{C58151C2-4E07-5B7A-3690-41CF0CB463F1}"/>
+                <a16:creationId xmlns:a16="http://schemas.microsoft.com/office/drawing/2014/main" id="{5876A090-2065-E76E-7621-A8A59B7688CC}"/>
               </a:ext>
             </a:extLst>
           </p:cNvPr>
@@ -7450,7 +7488,7 @@
             <a:picLocks noGrp="1" noChangeAspect="1"/>
           </p:cNvPicPr>
           <p:nvPr>
-            <p:ph sz="half" idx="2"/>
+            <p:ph sz="half" idx="1"/>
           </p:nvPr>
         </p:nvPicPr>
         <p:blipFill>
@@ -7467,47 +7505,20 @@
         </p:blipFill>
         <p:spPr>
           <a:xfrm>
-            <a:off x="6197599" y="1854958"/>
-            <a:ext cx="5886379" cy="3701080"/>
+            <a:off x="7219" y="1854958"/>
+            <a:ext cx="6119058" cy="3707642"/>
           </a:xfrm>
+          <a:prstGeom prst="rect">
+            <a:avLst/>
+          </a:prstGeom>
         </p:spPr>
       </p:pic>
-      <p:sp>
-        <p:nvSpPr>
-          <p:cNvPr id="4" name="Slide Number Placeholder 3">
+      <p:pic>
+        <p:nvPicPr>
+          <p:cNvPr id="17" name="Content Placeholder 16">
             <a:extLst>
               <a:ext uri="{FF2B5EF4-FFF2-40B4-BE49-F238E27FC236}">
-                <a16:creationId xmlns:a16="http://schemas.microsoft.com/office/drawing/2014/main" id="{909C1CC3-90DD-5424-245B-918BE5F30E05}"/>
-              </a:ext>
-            </a:extLst>
-          </p:cNvPr>
-          <p:cNvSpPr>
-            <a:spLocks noGrp="1"/>
-          </p:cNvSpPr>
-          <p:nvPr>
-            <p:ph type="sldNum" sz="quarter" idx="12"/>
-          </p:nvPr>
-        </p:nvSpPr>
-        <p:spPr/>
-        <p:txBody>
-          <a:bodyPr/>
-          <a:lstStyle/>
-          <a:p>
-            <a:fld id="{17E04E7E-C2A2-4357-ABA7-0779A9EE9F17}" type="slidenum">
-              <a:rPr lang="en-US" smtClean="0"/>
-              <a:pPr/>
-              <a:t>12</a:t>
-            </a:fld>
-            <a:endParaRPr lang="en-US"/>
-          </a:p>
-        </p:txBody>
-      </p:sp>
-      <p:pic>
-        <p:nvPicPr>
-          <p:cNvPr id="12" name="Content Placeholder 11" descr="A graph showing the growth of the stock market&#10;&#10;AI-generated content may be incorrect.">
-            <a:extLst>
-              <a:ext uri="{FF2B5EF4-FFF2-40B4-BE49-F238E27FC236}">
-                <a16:creationId xmlns:a16="http://schemas.microsoft.com/office/drawing/2014/main" id="{62B39AF0-5823-CE3E-F437-61EE465998CC}"/>
+                <a16:creationId xmlns:a16="http://schemas.microsoft.com/office/drawing/2014/main" id="{C2F58BA1-A8C7-6EB1-4ED1-A7EA4A6846FE}"/>
               </a:ext>
             </a:extLst>
           </p:cNvPr>
@@ -7515,7 +7526,7 @@
             <a:picLocks noGrp="1" noChangeAspect="1"/>
           </p:cNvPicPr>
           <p:nvPr>
-            <p:ph sz="half" idx="1"/>
+            <p:ph sz="half" idx="2"/>
           </p:nvPr>
         </p:nvPicPr>
         <p:blipFill>
@@ -7532,9 +7543,12 @@
         </p:blipFill>
         <p:spPr>
           <a:xfrm>
-            <a:off x="108021" y="1828800"/>
-            <a:ext cx="5886379" cy="3749285"/>
+            <a:off x="6197600" y="1841448"/>
+            <a:ext cx="5689600" cy="3837866"/>
           </a:xfrm>
+          <a:prstGeom prst="rect">
+            <a:avLst/>
+          </a:prstGeom>
         </p:spPr>
       </p:pic>
     </p:spTree>
@@ -7630,7 +7644,7 @@
           <a:p>
             <a:r>
               <a:rPr lang="is-IS" dirty="0"/>
-              <a:t>Strong real wage growth</a:t>
+              <a:t>Strong real wage growth (until very recently)</a:t>
             </a:r>
           </a:p>
           <a:p>
@@ -10624,17 +10638,17 @@
           <a:p>
             <a:r>
               <a:rPr lang="en-US" dirty="0"/>
-              <a:t>Unemployment rate in July 2025: 4.2%</a:t>
+              <a:t>Unemployment rate in July 2026: 4.1%</a:t>
             </a:r>
           </a:p>
         </p:txBody>
       </p:sp>
       <p:pic>
         <p:nvPicPr>
-          <p:cNvPr id="8" name="Content Placeholder 7" descr="A graph showing a line&#10;&#10;AI-generated content may be incorrect.">
+          <p:cNvPr id="9" name="Content Placeholder 8">
             <a:extLst>
               <a:ext uri="{FF2B5EF4-FFF2-40B4-BE49-F238E27FC236}">
-                <a16:creationId xmlns:a16="http://schemas.microsoft.com/office/drawing/2014/main" id="{A15CFA55-0271-772D-4298-8C8412CCF24D}"/>
+                <a16:creationId xmlns:a16="http://schemas.microsoft.com/office/drawing/2014/main" id="{A1DAF54A-8CB7-32EB-90EF-CC181E7CE85D}"/>
               </a:ext>
             </a:extLst>
           </p:cNvPr>
@@ -10659,9 +10673,12 @@
         </p:blipFill>
         <p:spPr>
           <a:xfrm>
-            <a:off x="757364" y="1600200"/>
-            <a:ext cx="10677272" cy="4525963"/>
+            <a:off x="1169663" y="1600200"/>
+            <a:ext cx="9852673" cy="4525963"/>
           </a:xfrm>
+          <a:prstGeom prst="rect">
+            <a:avLst/>
+          </a:prstGeom>
         </p:spPr>
       </p:pic>
     </p:spTree>
@@ -11335,16 +11352,18 @@
         <p:spPr>
           <a:xfrm>
             <a:off x="609600" y="1600200"/>
-            <a:ext cx="10972800" cy="4953000"/>
+            <a:ext cx="10972800" cy="5257800"/>
           </a:xfrm>
         </p:spPr>
         <p:txBody>
-          <a:bodyPr/>
-          <a:lstStyle/>
-          <a:p>
-            <a:r>
-              <a:rPr lang="en-US" dirty="0"/>
-              <a:t>Bernanke (2013) reading:</a:t>
+          <a:bodyPr>
+            <a:normAutofit/>
+          </a:bodyPr>
+          <a:lstStyle/>
+          <a:p>
+            <a:r>
+              <a:rPr lang="en-US" dirty="0"/>
+              <a:t>Bernanke (2013):</a:t>
             </a:r>
           </a:p>
           <a:p>
@@ -11393,7 +11412,14 @@
             <a:pPr lvl="1"/>
             <a:r>
               <a:rPr lang="en-US" dirty="0"/>
-              <a:t>Bernanke doesn’t think so.</a:t>
+              <a:t>Bernanke doesn’t think so. </a:t>
+            </a:r>
+          </a:p>
+          <a:p>
+            <a:pPr lvl="1"/>
+            <a:r>
+              <a:rPr lang="en-US" dirty="0"/>
+              <a:t>Others at the time worried it was (e.g., Gordon, 2016)</a:t>
             </a:r>
           </a:p>
         </p:txBody>
@@ -11705,6 +11731,37 @@
                                   </p:childTnLst>
                                 </p:cTn>
                               </p:par>
+                              <p:par>
+                                <p:cTn id="23" presetID="1" presetClass="entr" presetSubtype="0" fill="hold" nodeType="withEffect">
+                                  <p:stCondLst>
+                                    <p:cond delay="0"/>
+                                  </p:stCondLst>
+                                  <p:childTnLst>
+                                    <p:set>
+                                      <p:cBhvr>
+                                        <p:cTn id="24" dur="1" fill="hold">
+                                          <p:stCondLst>
+                                            <p:cond delay="0"/>
+                                          </p:stCondLst>
+                                        </p:cTn>
+                                        <p:tgtEl>
+                                          <p:spTgt spid="3">
+                                            <p:txEl>
+                                              <p:pRg st="7" end="7"/>
+                                            </p:txEl>
+                                          </p:spTgt>
+                                        </p:tgtEl>
+                                        <p:attrNameLst>
+                                          <p:attrName>style.visibility</p:attrName>
+                                        </p:attrNameLst>
+                                      </p:cBhvr>
+                                      <p:to>
+                                        <p:strVal val="visible"/>
+                                      </p:to>
+                                    </p:set>
+                                  </p:childTnLst>
+                                </p:cTn>
+                              </p:par>
                             </p:childTnLst>
                           </p:cTn>
                         </p:par>
@@ -11755,7 +11812,13 @@
       </p:grpSpPr>
       <p:sp>
         <p:nvSpPr>
-          <p:cNvPr id="2" name="Title 1"/>
+          <p:cNvPr id="2" name="Title 1">
+            <a:extLst>
+              <a:ext uri="{FF2B5EF4-FFF2-40B4-BE49-F238E27FC236}">
+                <a16:creationId xmlns:a16="http://schemas.microsoft.com/office/drawing/2014/main" id="{B32852F9-0D80-36D1-E5D2-BA1899810416}"/>
+              </a:ext>
+            </a:extLst>
+          </p:cNvPr>
           <p:cNvSpPr>
             <a:spLocks noGrp="1"/>
           </p:cNvSpPr>
@@ -11764,6 +11827,39 @@
           </p:nvPr>
         </p:nvSpPr>
         <p:spPr/>
+        <p:txBody>
+          <a:bodyPr/>
+          <a:lstStyle/>
+          <a:p>
+            <a:r>
+              <a:rPr lang="en-US" dirty="0"/>
+              <a:t>AI and Our Economic Future</a:t>
+            </a:r>
+          </a:p>
+        </p:txBody>
+      </p:sp>
+      <p:sp>
+        <p:nvSpPr>
+          <p:cNvPr id="3" name="Content Placeholder 2">
+            <a:extLst>
+              <a:ext uri="{FF2B5EF4-FFF2-40B4-BE49-F238E27FC236}">
+                <a16:creationId xmlns:a16="http://schemas.microsoft.com/office/drawing/2014/main" id="{88AAC1F8-FA64-70C5-79C7-340FBFD338F4}"/>
+              </a:ext>
+            </a:extLst>
+          </p:cNvPr>
+          <p:cNvSpPr>
+            <a:spLocks noGrp="1"/>
+          </p:cNvSpPr>
+          <p:nvPr>
+            <p:ph idx="1"/>
+          </p:nvPr>
+        </p:nvSpPr>
+        <p:spPr>
+          <a:xfrm>
+            <a:off x="609600" y="1600201"/>
+            <a:ext cx="10972800" cy="5121275"/>
+          </a:xfrm>
+        </p:spPr>
         <p:txBody>
           <a:bodyPr>
             <a:normAutofit/>
@@ -11772,81 +11868,64 @@
           <a:p>
             <a:r>
               <a:rPr lang="en-US" dirty="0"/>
-              <a:t>Key Questions About Growth:</a:t>
-            </a:r>
-          </a:p>
-        </p:txBody>
-      </p:sp>
-      <p:sp>
-        <p:nvSpPr>
-          <p:cNvPr id="3" name="Content Placeholder 2"/>
-          <p:cNvSpPr>
-            <a:spLocks noGrp="1"/>
-          </p:cNvSpPr>
-          <p:nvPr>
-            <p:ph idx="1"/>
-          </p:nvPr>
-        </p:nvSpPr>
-        <p:spPr>
-          <a:xfrm>
-            <a:off x="609600" y="1676400"/>
-            <a:ext cx="10972800" cy="4876800"/>
-          </a:xfrm>
-        </p:spPr>
-        <p:txBody>
-          <a:bodyPr>
-            <a:normAutofit/>
-          </a:bodyPr>
-          <a:lstStyle/>
-          <a:p>
-            <a:r>
-              <a:rPr lang="en-US" dirty="0"/>
-              <a:t>Why do growth rates differ so much across countries? </a:t>
-            </a:r>
-            <a:br>
-              <a:rPr lang="en-US" dirty="0"/>
-            </a:br>
-            <a:r>
-              <a:rPr lang="en-US" dirty="0"/>
-              <a:t>(China grew 3-4 times faster than the U.S. over last decades)</a:t>
-            </a:r>
-          </a:p>
-          <a:p>
-            <a:r>
-              <a:rPr lang="en-US" dirty="0"/>
-              <a:t>What is the source of economic growth?</a:t>
-            </a:r>
-            <a:br>
-              <a:rPr lang="en-US" dirty="0"/>
-            </a:br>
-            <a:r>
-              <a:rPr lang="en-US" sz="2800" dirty="0"/>
-              <a:t>(Why are we about 10 times richer than Americans a century ago?)</a:t>
-            </a:r>
-          </a:p>
-          <a:p>
-            <a:r>
-              <a:rPr lang="en-US" dirty="0"/>
-              <a:t>Why are some countries 50 times poorer than others?</a:t>
-            </a:r>
-          </a:p>
-          <a:p>
-            <a:r>
-              <a:rPr lang="en-US" dirty="0"/>
-              <a:t>How did modern economic growth begin? </a:t>
-            </a:r>
-          </a:p>
-          <a:p>
-            <a:r>
-              <a:rPr lang="en-US" dirty="0"/>
-              <a:t>Will it continue?</a:t>
-            </a:r>
-          </a:p>
-        </p:txBody>
-      </p:sp>
-      <p:sp>
-        <p:nvSpPr>
-          <p:cNvPr id="4" name="Slide Number Placeholder 3"/>
+              <a:t>AI may be the most transformative technology of our lifetimes</a:t>
+            </a:r>
+          </a:p>
+          <a:p>
+            <a:r>
+              <a:rPr lang="en-US" dirty="0"/>
+              <a:t>Last 250 years: Steam engine, internal combustion engine, electric motor, transistor, internet, etc. </a:t>
+            </a:r>
+          </a:p>
+          <a:p>
+            <a:r>
+              <a:rPr lang="en-US" dirty="0"/>
+              <a:t>Is AI fundamentally different?</a:t>
+            </a:r>
+          </a:p>
+          <a:p>
+            <a:pPr lvl="1"/>
+            <a:r>
+              <a:rPr lang="en-US" dirty="0"/>
+              <a:t>Will it lead growth to accelerate? </a:t>
+            </a:r>
+          </a:p>
+          <a:p>
+            <a:r>
+              <a:rPr lang="en-US" dirty="0"/>
+              <a:t>Or more of the same?</a:t>
+            </a:r>
+          </a:p>
+          <a:p>
+            <a:pPr lvl="1"/>
+            <a:r>
+              <a:rPr lang="en-US" dirty="0"/>
+              <a:t>Is it just the engine of growth for our era?</a:t>
+            </a:r>
+          </a:p>
+          <a:p>
+            <a:r>
+              <a:rPr lang="en-US" dirty="0"/>
+              <a:t>How long will it take for AI to transform the world?</a:t>
+            </a:r>
+          </a:p>
+          <a:p>
+            <a:r>
+              <a:rPr lang="en-US" dirty="0"/>
+              <a:t>Will it take all our jobs?</a:t>
+            </a:r>
+          </a:p>
+        </p:txBody>
+      </p:sp>
+      <p:sp>
+        <p:nvSpPr>
+          <p:cNvPr id="4" name="Slide Number Placeholder 3">
+            <a:extLst>
+              <a:ext uri="{FF2B5EF4-FFF2-40B4-BE49-F238E27FC236}">
+                <a16:creationId xmlns:a16="http://schemas.microsoft.com/office/drawing/2014/main" id="{ACE06E9A-DAFE-F286-9519-D09FAE0DDB3A}"/>
+              </a:ext>
+            </a:extLst>
+          </p:cNvPr>
           <p:cNvSpPr>
             <a:spLocks noGrp="1"/>
           </p:cNvSpPr>
@@ -11871,13 +11950,314 @@
     </p:spTree>
     <p:extLst>
       <p:ext uri="{BB962C8B-B14F-4D97-AF65-F5344CB8AC3E}">
-        <p14:creationId xmlns:p14="http://schemas.microsoft.com/office/powerpoint/2010/main" val="1471037080"/>
+        <p14:creationId xmlns:p14="http://schemas.microsoft.com/office/powerpoint/2010/main" val="1337659010"/>
       </p:ext>
     </p:extLst>
   </p:cSld>
   <p:clrMapOvr>
     <a:masterClrMapping/>
   </p:clrMapOvr>
+  <p:timing>
+    <p:tnLst>
+      <p:par>
+        <p:cTn id="1" dur="indefinite" restart="never" nodeType="tmRoot">
+          <p:childTnLst>
+            <p:seq concurrent="1" nextAc="seek">
+              <p:cTn id="2" dur="indefinite" nodeType="mainSeq">
+                <p:childTnLst>
+                  <p:par>
+                    <p:cTn id="3" fill="hold">
+                      <p:stCondLst>
+                        <p:cond delay="indefinite"/>
+                      </p:stCondLst>
+                      <p:childTnLst>
+                        <p:par>
+                          <p:cTn id="4" fill="hold">
+                            <p:stCondLst>
+                              <p:cond delay="0"/>
+                            </p:stCondLst>
+                            <p:childTnLst>
+                              <p:par>
+                                <p:cTn id="5" presetID="1" presetClass="entr" presetSubtype="0" fill="hold" nodeType="clickEffect">
+                                  <p:stCondLst>
+                                    <p:cond delay="0"/>
+                                  </p:stCondLst>
+                                  <p:childTnLst>
+                                    <p:set>
+                                      <p:cBhvr>
+                                        <p:cTn id="6" dur="1" fill="hold">
+                                          <p:stCondLst>
+                                            <p:cond delay="0"/>
+                                          </p:stCondLst>
+                                        </p:cTn>
+                                        <p:tgtEl>
+                                          <p:spTgt spid="3">
+                                            <p:txEl>
+                                              <p:pRg st="1" end="1"/>
+                                            </p:txEl>
+                                          </p:spTgt>
+                                        </p:tgtEl>
+                                        <p:attrNameLst>
+                                          <p:attrName>style.visibility</p:attrName>
+                                        </p:attrNameLst>
+                                      </p:cBhvr>
+                                      <p:to>
+                                        <p:strVal val="visible"/>
+                                      </p:to>
+                                    </p:set>
+                                  </p:childTnLst>
+                                </p:cTn>
+                              </p:par>
+                            </p:childTnLst>
+                          </p:cTn>
+                        </p:par>
+                      </p:childTnLst>
+                    </p:cTn>
+                  </p:par>
+                  <p:par>
+                    <p:cTn id="7" fill="hold">
+                      <p:stCondLst>
+                        <p:cond delay="indefinite"/>
+                      </p:stCondLst>
+                      <p:childTnLst>
+                        <p:par>
+                          <p:cTn id="8" fill="hold">
+                            <p:stCondLst>
+                              <p:cond delay="0"/>
+                            </p:stCondLst>
+                            <p:childTnLst>
+                              <p:par>
+                                <p:cTn id="9" presetID="1" presetClass="entr" presetSubtype="0" fill="hold" nodeType="clickEffect">
+                                  <p:stCondLst>
+                                    <p:cond delay="0"/>
+                                  </p:stCondLst>
+                                  <p:childTnLst>
+                                    <p:set>
+                                      <p:cBhvr>
+                                        <p:cTn id="10" dur="1" fill="hold">
+                                          <p:stCondLst>
+                                            <p:cond delay="0"/>
+                                          </p:stCondLst>
+                                        </p:cTn>
+                                        <p:tgtEl>
+                                          <p:spTgt spid="3">
+                                            <p:txEl>
+                                              <p:pRg st="2" end="2"/>
+                                            </p:txEl>
+                                          </p:spTgt>
+                                        </p:tgtEl>
+                                        <p:attrNameLst>
+                                          <p:attrName>style.visibility</p:attrName>
+                                        </p:attrNameLst>
+                                      </p:cBhvr>
+                                      <p:to>
+                                        <p:strVal val="visible"/>
+                                      </p:to>
+                                    </p:set>
+                                  </p:childTnLst>
+                                </p:cTn>
+                              </p:par>
+                              <p:par>
+                                <p:cTn id="11" presetID="1" presetClass="entr" presetSubtype="0" fill="hold" nodeType="withEffect">
+                                  <p:stCondLst>
+                                    <p:cond delay="0"/>
+                                  </p:stCondLst>
+                                  <p:childTnLst>
+                                    <p:set>
+                                      <p:cBhvr>
+                                        <p:cTn id="12" dur="1" fill="hold">
+                                          <p:stCondLst>
+                                            <p:cond delay="0"/>
+                                          </p:stCondLst>
+                                        </p:cTn>
+                                        <p:tgtEl>
+                                          <p:spTgt spid="3">
+                                            <p:txEl>
+                                              <p:pRg st="3" end="3"/>
+                                            </p:txEl>
+                                          </p:spTgt>
+                                        </p:tgtEl>
+                                        <p:attrNameLst>
+                                          <p:attrName>style.visibility</p:attrName>
+                                        </p:attrNameLst>
+                                      </p:cBhvr>
+                                      <p:to>
+                                        <p:strVal val="visible"/>
+                                      </p:to>
+                                    </p:set>
+                                  </p:childTnLst>
+                                </p:cTn>
+                              </p:par>
+                              <p:par>
+                                <p:cTn id="13" presetID="1" presetClass="entr" presetSubtype="0" fill="hold" nodeType="withEffect">
+                                  <p:stCondLst>
+                                    <p:cond delay="0"/>
+                                  </p:stCondLst>
+                                  <p:childTnLst>
+                                    <p:set>
+                                      <p:cBhvr>
+                                        <p:cTn id="14" dur="1" fill="hold">
+                                          <p:stCondLst>
+                                            <p:cond delay="0"/>
+                                          </p:stCondLst>
+                                        </p:cTn>
+                                        <p:tgtEl>
+                                          <p:spTgt spid="3">
+                                            <p:txEl>
+                                              <p:pRg st="4" end="4"/>
+                                            </p:txEl>
+                                          </p:spTgt>
+                                        </p:tgtEl>
+                                        <p:attrNameLst>
+                                          <p:attrName>style.visibility</p:attrName>
+                                        </p:attrNameLst>
+                                      </p:cBhvr>
+                                      <p:to>
+                                        <p:strVal val="visible"/>
+                                      </p:to>
+                                    </p:set>
+                                  </p:childTnLst>
+                                </p:cTn>
+                              </p:par>
+                              <p:par>
+                                <p:cTn id="15" presetID="1" presetClass="entr" presetSubtype="0" fill="hold" nodeType="withEffect">
+                                  <p:stCondLst>
+                                    <p:cond delay="0"/>
+                                  </p:stCondLst>
+                                  <p:childTnLst>
+                                    <p:set>
+                                      <p:cBhvr>
+                                        <p:cTn id="16" dur="1" fill="hold">
+                                          <p:stCondLst>
+                                            <p:cond delay="0"/>
+                                          </p:stCondLst>
+                                        </p:cTn>
+                                        <p:tgtEl>
+                                          <p:spTgt spid="3">
+                                            <p:txEl>
+                                              <p:pRg st="5" end="5"/>
+                                            </p:txEl>
+                                          </p:spTgt>
+                                        </p:tgtEl>
+                                        <p:attrNameLst>
+                                          <p:attrName>style.visibility</p:attrName>
+                                        </p:attrNameLst>
+                                      </p:cBhvr>
+                                      <p:to>
+                                        <p:strVal val="visible"/>
+                                      </p:to>
+                                    </p:set>
+                                  </p:childTnLst>
+                                </p:cTn>
+                              </p:par>
+                            </p:childTnLst>
+                          </p:cTn>
+                        </p:par>
+                      </p:childTnLst>
+                    </p:cTn>
+                  </p:par>
+                  <p:par>
+                    <p:cTn id="17" fill="hold">
+                      <p:stCondLst>
+                        <p:cond delay="indefinite"/>
+                      </p:stCondLst>
+                      <p:childTnLst>
+                        <p:par>
+                          <p:cTn id="18" fill="hold">
+                            <p:stCondLst>
+                              <p:cond delay="0"/>
+                            </p:stCondLst>
+                            <p:childTnLst>
+                              <p:par>
+                                <p:cTn id="19" presetID="1" presetClass="entr" presetSubtype="0" fill="hold" nodeType="clickEffect">
+                                  <p:stCondLst>
+                                    <p:cond delay="0"/>
+                                  </p:stCondLst>
+                                  <p:childTnLst>
+                                    <p:set>
+                                      <p:cBhvr>
+                                        <p:cTn id="20" dur="1" fill="hold">
+                                          <p:stCondLst>
+                                            <p:cond delay="0"/>
+                                          </p:stCondLst>
+                                        </p:cTn>
+                                        <p:tgtEl>
+                                          <p:spTgt spid="3">
+                                            <p:txEl>
+                                              <p:pRg st="6" end="6"/>
+                                            </p:txEl>
+                                          </p:spTgt>
+                                        </p:tgtEl>
+                                        <p:attrNameLst>
+                                          <p:attrName>style.visibility</p:attrName>
+                                        </p:attrNameLst>
+                                      </p:cBhvr>
+                                      <p:to>
+                                        <p:strVal val="visible"/>
+                                      </p:to>
+                                    </p:set>
+                                  </p:childTnLst>
+                                </p:cTn>
+                              </p:par>
+                              <p:par>
+                                <p:cTn id="21" presetID="1" presetClass="entr" presetSubtype="0" fill="hold" nodeType="withEffect">
+                                  <p:stCondLst>
+                                    <p:cond delay="0"/>
+                                  </p:stCondLst>
+                                  <p:childTnLst>
+                                    <p:set>
+                                      <p:cBhvr>
+                                        <p:cTn id="22" dur="1" fill="hold">
+                                          <p:stCondLst>
+                                            <p:cond delay="0"/>
+                                          </p:stCondLst>
+                                        </p:cTn>
+                                        <p:tgtEl>
+                                          <p:spTgt spid="3">
+                                            <p:txEl>
+                                              <p:pRg st="7" end="7"/>
+                                            </p:txEl>
+                                          </p:spTgt>
+                                        </p:tgtEl>
+                                        <p:attrNameLst>
+                                          <p:attrName>style.visibility</p:attrName>
+                                        </p:attrNameLst>
+                                      </p:cBhvr>
+                                      <p:to>
+                                        <p:strVal val="visible"/>
+                                      </p:to>
+                                    </p:set>
+                                  </p:childTnLst>
+                                </p:cTn>
+                              </p:par>
+                            </p:childTnLst>
+                          </p:cTn>
+                        </p:par>
+                      </p:childTnLst>
+                    </p:cTn>
+                  </p:par>
+                </p:childTnLst>
+              </p:cTn>
+              <p:prevCondLst>
+                <p:cond evt="onPrev" delay="0">
+                  <p:tgtEl>
+                    <p:sldTgt/>
+                  </p:tgtEl>
+                </p:cond>
+              </p:prevCondLst>
+              <p:nextCondLst>
+                <p:cond evt="onNext" delay="0">
+                  <p:tgtEl>
+                    <p:sldTgt/>
+                  </p:tgtEl>
+                </p:cond>
+              </p:nextCondLst>
+            </p:seq>
+          </p:childTnLst>
+        </p:cTn>
+      </p:par>
+    </p:tnLst>
+  </p:timing>
 </p:sld>
 </file>
 
@@ -11908,6 +12288,322 @@
             <p:ph type="title"/>
           </p:nvPr>
         </p:nvSpPr>
+        <p:spPr/>
+        <p:txBody>
+          <a:bodyPr>
+            <a:normAutofit/>
+          </a:bodyPr>
+          <a:lstStyle/>
+          <a:p>
+            <a:r>
+              <a:rPr lang="en-US" dirty="0"/>
+              <a:t>Key Questions About Growth:</a:t>
+            </a:r>
+          </a:p>
+        </p:txBody>
+      </p:sp>
+      <p:sp>
+        <p:nvSpPr>
+          <p:cNvPr id="3" name="Content Placeholder 2"/>
+          <p:cNvSpPr>
+            <a:spLocks noGrp="1"/>
+          </p:cNvSpPr>
+          <p:nvPr>
+            <p:ph idx="1"/>
+          </p:nvPr>
+        </p:nvSpPr>
+        <p:spPr>
+          <a:xfrm>
+            <a:off x="609600" y="1676400"/>
+            <a:ext cx="10972800" cy="4876800"/>
+          </a:xfrm>
+        </p:spPr>
+        <p:txBody>
+          <a:bodyPr>
+            <a:normAutofit/>
+          </a:bodyPr>
+          <a:lstStyle/>
+          <a:p>
+            <a:r>
+              <a:rPr lang="en-US" dirty="0"/>
+              <a:t>Why do growth rates differ so much across countries? </a:t>
+            </a:r>
+            <a:br>
+              <a:rPr lang="en-US" dirty="0"/>
+            </a:br>
+            <a:r>
+              <a:rPr lang="en-US" dirty="0"/>
+              <a:t>(China grew 3-4 times faster than the U.S. over last decades)</a:t>
+            </a:r>
+          </a:p>
+          <a:p>
+            <a:r>
+              <a:rPr lang="en-US" dirty="0"/>
+              <a:t>What is the source of economic growth?</a:t>
+            </a:r>
+            <a:br>
+              <a:rPr lang="en-US" dirty="0"/>
+            </a:br>
+            <a:r>
+              <a:rPr lang="en-US" sz="2800" dirty="0"/>
+              <a:t>(Why are we about 10 times richer than Americans a century ago?)</a:t>
+            </a:r>
+          </a:p>
+          <a:p>
+            <a:r>
+              <a:rPr lang="en-US" dirty="0"/>
+              <a:t>Why are some countries 50 times poorer than others?</a:t>
+            </a:r>
+          </a:p>
+          <a:p>
+            <a:r>
+              <a:rPr lang="en-US" dirty="0"/>
+              <a:t>How did modern economic growth begin? </a:t>
+            </a:r>
+          </a:p>
+          <a:p>
+            <a:r>
+              <a:rPr lang="en-US" dirty="0"/>
+              <a:t>Will it continue?</a:t>
+            </a:r>
+          </a:p>
+        </p:txBody>
+      </p:sp>
+      <p:sp>
+        <p:nvSpPr>
+          <p:cNvPr id="4" name="Slide Number Placeholder 3"/>
+          <p:cNvSpPr>
+            <a:spLocks noGrp="1"/>
+          </p:cNvSpPr>
+          <p:nvPr>
+            <p:ph type="sldNum" sz="quarter" idx="12"/>
+          </p:nvPr>
+        </p:nvSpPr>
+        <p:spPr/>
+        <p:txBody>
+          <a:bodyPr/>
+          <a:lstStyle/>
+          <a:p>
+            <a:fld id="{17E04E7E-C2A2-4357-ABA7-0779A9EE9F17}" type="slidenum">
+              <a:rPr lang="en-US" smtClean="0"/>
+              <a:pPr/>
+              <a:t>36</a:t>
+            </a:fld>
+            <a:endParaRPr lang="en-US"/>
+          </a:p>
+        </p:txBody>
+      </p:sp>
+    </p:spTree>
+    <p:extLst>
+      <p:ext uri="{BB962C8B-B14F-4D97-AF65-F5344CB8AC3E}">
+        <p14:creationId xmlns:p14="http://schemas.microsoft.com/office/powerpoint/2010/main" val="1471037080"/>
+      </p:ext>
+    </p:extLst>
+  </p:cSld>
+  <p:clrMapOvr>
+    <a:masterClrMapping/>
+  </p:clrMapOvr>
+</p:sld>
+</file>
+
+<file path=ppt/slides/slide37.xml><?xml version="1.0" encoding="utf-8"?>
+<p:sld xmlns:a="http://schemas.openxmlformats.org/drawingml/2006/main" xmlns:r="http://schemas.openxmlformats.org/officeDocument/2006/relationships" xmlns:p="http://schemas.openxmlformats.org/presentationml/2006/main">
+  <p:cSld>
+    <p:spTree>
+      <p:nvGrpSpPr>
+        <p:cNvPr id="1" name=""/>
+        <p:cNvGrpSpPr/>
+        <p:nvPr/>
+      </p:nvGrpSpPr>
+      <p:grpSpPr>
+        <a:xfrm>
+          <a:off x="0" y="0"/>
+          <a:ext cx="0" cy="0"/>
+          <a:chOff x="0" y="0"/>
+          <a:chExt cx="0" cy="0"/>
+        </a:xfrm>
+      </p:grpSpPr>
+      <p:sp>
+        <p:nvSpPr>
+          <p:cNvPr id="2" name="Title 1">
+            <a:extLst>
+              <a:ext uri="{FF2B5EF4-FFF2-40B4-BE49-F238E27FC236}">
+                <a16:creationId xmlns:a16="http://schemas.microsoft.com/office/drawing/2014/main" id="{501D5F32-4FEF-8500-A2F3-54B421829487}"/>
+              </a:ext>
+            </a:extLst>
+          </p:cNvPr>
+          <p:cNvSpPr>
+            <a:spLocks noGrp="1"/>
+          </p:cNvSpPr>
+          <p:nvPr>
+            <p:ph type="title"/>
+          </p:nvPr>
+        </p:nvSpPr>
+        <p:spPr/>
+        <p:txBody>
+          <a:bodyPr/>
+          <a:lstStyle/>
+          <a:p>
+            <a:r>
+              <a:rPr lang="is-IS" dirty="0"/>
+              <a:t>Future Economic Growth</a:t>
+            </a:r>
+            <a:endParaRPr lang="en-US" dirty="0"/>
+          </a:p>
+        </p:txBody>
+      </p:sp>
+      <p:sp>
+        <p:nvSpPr>
+          <p:cNvPr id="3" name="Content Placeholder 2">
+            <a:extLst>
+              <a:ext uri="{FF2B5EF4-FFF2-40B4-BE49-F238E27FC236}">
+                <a16:creationId xmlns:a16="http://schemas.microsoft.com/office/drawing/2014/main" id="{8FC39589-7254-B41C-4C2E-5D88E9D48F67}"/>
+              </a:ext>
+            </a:extLst>
+          </p:cNvPr>
+          <p:cNvSpPr>
+            <a:spLocks noGrp="1"/>
+          </p:cNvSpPr>
+          <p:nvPr>
+            <p:ph idx="1"/>
+          </p:nvPr>
+        </p:nvSpPr>
+        <p:spPr/>
+        <p:txBody>
+          <a:bodyPr/>
+          <a:lstStyle/>
+          <a:p>
+            <a:endParaRPr lang="is-IS" dirty="0"/>
+          </a:p>
+          <a:p>
+            <a:r>
+              <a:rPr lang="en-US" dirty="0"/>
+              <a:t>What will be the average rate of growth of GDP per capita in the U.S. from 2025-2075</a:t>
+            </a:r>
+          </a:p>
+          <a:p>
+            <a:pPr marL="914400" lvl="1" indent="-514350">
+              <a:buFont typeface="+mj-lt"/>
+              <a:buAutoNum type="alphaLcParenR"/>
+            </a:pPr>
+            <a:r>
+              <a:rPr lang="en-US" dirty="0"/>
+              <a:t>&lt;1%</a:t>
+            </a:r>
+          </a:p>
+          <a:p>
+            <a:pPr marL="914400" lvl="1" indent="-514350">
+              <a:buFont typeface="+mj-lt"/>
+              <a:buAutoNum type="alphaLcParenR"/>
+            </a:pPr>
+            <a:r>
+              <a:rPr lang="en-US" dirty="0"/>
+              <a:t>1-2%</a:t>
+            </a:r>
+          </a:p>
+          <a:p>
+            <a:pPr marL="914400" lvl="1" indent="-514350">
+              <a:buFont typeface="+mj-lt"/>
+              <a:buAutoNum type="alphaLcParenR"/>
+            </a:pPr>
+            <a:r>
+              <a:rPr lang="en-US" dirty="0"/>
+              <a:t>2-3%</a:t>
+            </a:r>
+          </a:p>
+          <a:p>
+            <a:pPr marL="914400" lvl="1" indent="-514350">
+              <a:buFont typeface="+mj-lt"/>
+              <a:buAutoNum type="alphaLcParenR"/>
+            </a:pPr>
+            <a:r>
+              <a:rPr lang="en-US" dirty="0"/>
+              <a:t>3-5%</a:t>
+            </a:r>
+          </a:p>
+          <a:p>
+            <a:pPr marL="914400" lvl="1" indent="-514350">
+              <a:buFont typeface="+mj-lt"/>
+              <a:buAutoNum type="alphaLcParenR"/>
+            </a:pPr>
+            <a:r>
+              <a:rPr lang="en-US"/>
+              <a:t>&gt;5%</a:t>
+            </a:r>
+            <a:endParaRPr lang="en-US" dirty="0"/>
+          </a:p>
+        </p:txBody>
+      </p:sp>
+      <p:sp>
+        <p:nvSpPr>
+          <p:cNvPr id="4" name="Slide Number Placeholder 3">
+            <a:extLst>
+              <a:ext uri="{FF2B5EF4-FFF2-40B4-BE49-F238E27FC236}">
+                <a16:creationId xmlns:a16="http://schemas.microsoft.com/office/drawing/2014/main" id="{EF4E6301-9B09-6269-DAEE-004F9CAB7C64}"/>
+              </a:ext>
+            </a:extLst>
+          </p:cNvPr>
+          <p:cNvSpPr>
+            <a:spLocks noGrp="1"/>
+          </p:cNvSpPr>
+          <p:nvPr>
+            <p:ph type="sldNum" sz="quarter" idx="12"/>
+          </p:nvPr>
+        </p:nvSpPr>
+        <p:spPr/>
+        <p:txBody>
+          <a:bodyPr/>
+          <a:lstStyle/>
+          <a:p>
+            <a:fld id="{17E04E7E-C2A2-4357-ABA7-0779A9EE9F17}" type="slidenum">
+              <a:rPr lang="en-US" smtClean="0"/>
+              <a:pPr/>
+              <a:t>37</a:t>
+            </a:fld>
+            <a:endParaRPr lang="en-US"/>
+          </a:p>
+        </p:txBody>
+      </p:sp>
+    </p:spTree>
+    <p:extLst>
+      <p:ext uri="{BB962C8B-B14F-4D97-AF65-F5344CB8AC3E}">
+        <p14:creationId xmlns:p14="http://schemas.microsoft.com/office/powerpoint/2010/main" val="2305675976"/>
+      </p:ext>
+    </p:extLst>
+  </p:cSld>
+  <p:clrMapOvr>
+    <a:masterClrMapping/>
+  </p:clrMapOvr>
+</p:sld>
+</file>
+
+<file path=ppt/slides/slide38.xml><?xml version="1.0" encoding="utf-8"?>
+<p:sld xmlns:a="http://schemas.openxmlformats.org/drawingml/2006/main" xmlns:r="http://schemas.openxmlformats.org/officeDocument/2006/relationships" xmlns:p="http://schemas.openxmlformats.org/presentationml/2006/main">
+  <p:cSld>
+    <p:spTree>
+      <p:nvGrpSpPr>
+        <p:cNvPr id="1" name=""/>
+        <p:cNvGrpSpPr/>
+        <p:nvPr/>
+      </p:nvGrpSpPr>
+      <p:grpSpPr>
+        <a:xfrm>
+          <a:off x="0" y="0"/>
+          <a:ext cx="0" cy="0"/>
+          <a:chOff x="0" y="0"/>
+          <a:chExt cx="0" cy="0"/>
+        </a:xfrm>
+      </p:grpSpPr>
+      <p:sp>
+        <p:nvSpPr>
+          <p:cNvPr id="2" name="Title 1"/>
+          <p:cNvSpPr>
+            <a:spLocks noGrp="1"/>
+          </p:cNvSpPr>
+          <p:nvPr>
+            <p:ph type="title"/>
+          </p:nvPr>
+        </p:nvSpPr>
         <p:spPr>
           <a:xfrm>
             <a:off x="1981200" y="29029"/>
@@ -11943,7 +12639,7 @@
             <a:fld id="{17E04E7E-C2A2-4357-ABA7-0779A9EE9F17}" type="slidenum">
               <a:rPr lang="en-US" smtClean="0"/>
               <a:pPr/>
-              <a:t>36</a:t>
+              <a:t>38</a:t>
             </a:fld>
             <a:endParaRPr lang="en-US"/>
           </a:p>
@@ -11997,7 +12693,7 @@
 </p:sld>
 </file>
 
-<file path=ppt/slides/slide37.xml><?xml version="1.0" encoding="utf-8"?>
+<file path=ppt/slides/slide39.xml><?xml version="1.0" encoding="utf-8"?>
 <p:sld xmlns:a="http://schemas.openxmlformats.org/drawingml/2006/main" xmlns:r="http://schemas.openxmlformats.org/officeDocument/2006/relationships" xmlns:p="http://schemas.openxmlformats.org/presentationml/2006/main">
   <p:cSld>
     <p:spTree>
@@ -12055,7 +12751,7 @@
             <a:fld id="{17E04E7E-C2A2-4357-ABA7-0779A9EE9F17}" type="slidenum">
               <a:rPr lang="en-US" smtClean="0"/>
               <a:pPr/>
-              <a:t>37</a:t>
+              <a:t>39</a:t>
             </a:fld>
             <a:endParaRPr lang="en-US"/>
           </a:p>
@@ -12098,7 +12794,121 @@
 </p:sld>
 </file>
 
-<file path=ppt/slides/slide38.xml><?xml version="1.0" encoding="utf-8"?>
+<file path=ppt/slides/slide4.xml><?xml version="1.0" encoding="utf-8"?>
+<p:sld xmlns:a="http://schemas.openxmlformats.org/drawingml/2006/main" xmlns:r="http://schemas.openxmlformats.org/officeDocument/2006/relationships" xmlns:p="http://schemas.openxmlformats.org/presentationml/2006/main">
+  <p:cSld>
+    <p:spTree>
+      <p:nvGrpSpPr>
+        <p:cNvPr id="1" name=""/>
+        <p:cNvGrpSpPr/>
+        <p:nvPr/>
+      </p:nvGrpSpPr>
+      <p:grpSpPr>
+        <a:xfrm>
+          <a:off x="0" y="0"/>
+          <a:ext cx="0" cy="0"/>
+          <a:chOff x="0" y="0"/>
+          <a:chExt cx="0" cy="0"/>
+        </a:xfrm>
+      </p:grpSpPr>
+      <p:sp>
+        <p:nvSpPr>
+          <p:cNvPr id="2" name="Title 1"/>
+          <p:cNvSpPr>
+            <a:spLocks noGrp="1"/>
+          </p:cNvSpPr>
+          <p:nvPr>
+            <p:ph type="title"/>
+          </p:nvPr>
+        </p:nvSpPr>
+        <p:spPr/>
+        <p:txBody>
+          <a:bodyPr/>
+          <a:lstStyle/>
+          <a:p>
+            <a:r>
+              <a:rPr lang="en-US" dirty="0"/>
+              <a:t>Unemployment Rate – Long View</a:t>
+            </a:r>
+          </a:p>
+        </p:txBody>
+      </p:sp>
+      <p:sp>
+        <p:nvSpPr>
+          <p:cNvPr id="4" name="Slide Number Placeholder 3"/>
+          <p:cNvSpPr>
+            <a:spLocks noGrp="1"/>
+          </p:cNvSpPr>
+          <p:nvPr>
+            <p:ph type="sldNum" sz="quarter" idx="12"/>
+          </p:nvPr>
+        </p:nvSpPr>
+        <p:spPr/>
+        <p:txBody>
+          <a:bodyPr/>
+          <a:lstStyle/>
+          <a:p>
+            <a:fld id="{17E04E7E-C2A2-4357-ABA7-0779A9EE9F17}" type="slidenum">
+              <a:rPr lang="en-US" smtClean="0"/>
+              <a:pPr/>
+              <a:t>4</a:t>
+            </a:fld>
+            <a:endParaRPr lang="en-US"/>
+          </a:p>
+        </p:txBody>
+      </p:sp>
+      <p:pic>
+        <p:nvPicPr>
+          <p:cNvPr id="7" name="Content Placeholder 6">
+            <a:extLst>
+              <a:ext uri="{FF2B5EF4-FFF2-40B4-BE49-F238E27FC236}">
+                <a16:creationId xmlns:a16="http://schemas.microsoft.com/office/drawing/2014/main" id="{E240C642-2BF0-3AE3-AE72-68AC8DD15CF1}"/>
+              </a:ext>
+            </a:extLst>
+          </p:cNvPr>
+          <p:cNvPicPr>
+            <a:picLocks noGrp="1" noChangeAspect="1"/>
+          </p:cNvPicPr>
+          <p:nvPr>
+            <p:ph idx="1"/>
+          </p:nvPr>
+        </p:nvPicPr>
+        <p:blipFill>
+          <a:blip r:embed="rId3">
+            <a:extLst>
+              <a:ext uri="{28A0092B-C50C-407E-A947-70E740481C1C}">
+                <a14:useLocalDpi xmlns:a14="http://schemas.microsoft.com/office/drawing/2010/main" val="0"/>
+              </a:ext>
+            </a:extLst>
+          </a:blip>
+          <a:stretch>
+            <a:fillRect/>
+          </a:stretch>
+        </p:blipFill>
+        <p:spPr>
+          <a:xfrm>
+            <a:off x="419100" y="1219200"/>
+            <a:ext cx="11353800" cy="5230177"/>
+          </a:xfrm>
+          <a:prstGeom prst="rect">
+            <a:avLst/>
+          </a:prstGeom>
+        </p:spPr>
+      </p:pic>
+    </p:spTree>
+    <p:extLst>
+      <p:ext uri="{BB962C8B-B14F-4D97-AF65-F5344CB8AC3E}">
+        <p14:creationId xmlns:p14="http://schemas.microsoft.com/office/powerpoint/2010/main" val="223380621"/>
+      </p:ext>
+    </p:extLst>
+  </p:cSld>
+  <p:clrMapOvr>
+    <a:masterClrMapping/>
+  </p:clrMapOvr>
+</p:sld>
+</file>
+
+<file path=ppt/slides/slide40.xml><?xml version="1.0" encoding="utf-8"?>
 <p:sld xmlns:a="http://schemas.openxmlformats.org/drawingml/2006/main" xmlns:r="http://schemas.openxmlformats.org/officeDocument/2006/relationships" xmlns:p="http://schemas.openxmlformats.org/presentationml/2006/main">
   <p:cSld>
     <p:spTree>
@@ -12156,7 +12966,7 @@
             <a:fld id="{17E04E7E-C2A2-4357-ABA7-0779A9EE9F17}" type="slidenum">
               <a:rPr lang="en-US" smtClean="0"/>
               <a:pPr/>
-              <a:t>38</a:t>
+              <a:t>40</a:t>
             </a:fld>
             <a:endParaRPr lang="en-US"/>
           </a:p>
@@ -12175,7 +12985,7 @@
 </p:sld>
 </file>
 
-<file path=ppt/slides/slide39.xml><?xml version="1.0" encoding="utf-8"?>
+<file path=ppt/slides/slide41.xml><?xml version="1.0" encoding="utf-8"?>
 <p:sld xmlns:a="http://schemas.openxmlformats.org/drawingml/2006/main" xmlns:r="http://schemas.openxmlformats.org/officeDocument/2006/relationships" xmlns:p="http://schemas.openxmlformats.org/presentationml/2006/main">
   <p:cSld>
     <p:spTree>
@@ -12275,7 +13085,7 @@
             <a:fld id="{17E04E7E-C2A2-4357-ABA7-0779A9EE9F17}" type="slidenum">
               <a:rPr lang="en-US" smtClean="0"/>
               <a:pPr/>
-              <a:t>39</a:t>
+              <a:t>41</a:t>
             </a:fld>
             <a:endParaRPr lang="en-US"/>
           </a:p>
@@ -12500,118 +13310,7 @@
 </p:sld>
 </file>
 
-<file path=ppt/slides/slide4.xml><?xml version="1.0" encoding="utf-8"?>
-<p:sld xmlns:a="http://schemas.openxmlformats.org/drawingml/2006/main" xmlns:r="http://schemas.openxmlformats.org/officeDocument/2006/relationships" xmlns:p="http://schemas.openxmlformats.org/presentationml/2006/main">
-  <p:cSld>
-    <p:spTree>
-      <p:nvGrpSpPr>
-        <p:cNvPr id="1" name=""/>
-        <p:cNvGrpSpPr/>
-        <p:nvPr/>
-      </p:nvGrpSpPr>
-      <p:grpSpPr>
-        <a:xfrm>
-          <a:off x="0" y="0"/>
-          <a:ext cx="0" cy="0"/>
-          <a:chOff x="0" y="0"/>
-          <a:chExt cx="0" cy="0"/>
-        </a:xfrm>
-      </p:grpSpPr>
-      <p:sp>
-        <p:nvSpPr>
-          <p:cNvPr id="2" name="Title 1"/>
-          <p:cNvSpPr>
-            <a:spLocks noGrp="1"/>
-          </p:cNvSpPr>
-          <p:nvPr>
-            <p:ph type="title"/>
-          </p:nvPr>
-        </p:nvSpPr>
-        <p:spPr/>
-        <p:txBody>
-          <a:bodyPr/>
-          <a:lstStyle/>
-          <a:p>
-            <a:r>
-              <a:rPr lang="en-US" dirty="0"/>
-              <a:t>Unemployment Rate – Long View</a:t>
-            </a:r>
-          </a:p>
-        </p:txBody>
-      </p:sp>
-      <p:sp>
-        <p:nvSpPr>
-          <p:cNvPr id="4" name="Slide Number Placeholder 3"/>
-          <p:cNvSpPr>
-            <a:spLocks noGrp="1"/>
-          </p:cNvSpPr>
-          <p:nvPr>
-            <p:ph type="sldNum" sz="quarter" idx="12"/>
-          </p:nvPr>
-        </p:nvSpPr>
-        <p:spPr/>
-        <p:txBody>
-          <a:bodyPr/>
-          <a:lstStyle/>
-          <a:p>
-            <a:fld id="{17E04E7E-C2A2-4357-ABA7-0779A9EE9F17}" type="slidenum">
-              <a:rPr lang="en-US" smtClean="0"/>
-              <a:pPr/>
-              <a:t>4</a:t>
-            </a:fld>
-            <a:endParaRPr lang="en-US"/>
-          </a:p>
-        </p:txBody>
-      </p:sp>
-      <p:pic>
-        <p:nvPicPr>
-          <p:cNvPr id="8" name="Content Placeholder 7" descr="A graph showing a line&#10;&#10;AI-generated content may be incorrect.">
-            <a:extLst>
-              <a:ext uri="{FF2B5EF4-FFF2-40B4-BE49-F238E27FC236}">
-                <a16:creationId xmlns:a16="http://schemas.microsoft.com/office/drawing/2014/main" id="{4D05E5A0-09E5-5D34-C485-69F99CDA1EAC}"/>
-              </a:ext>
-            </a:extLst>
-          </p:cNvPr>
-          <p:cNvPicPr>
-            <a:picLocks noGrp="1" noChangeAspect="1"/>
-          </p:cNvPicPr>
-          <p:nvPr>
-            <p:ph idx="1"/>
-          </p:nvPr>
-        </p:nvPicPr>
-        <p:blipFill>
-          <a:blip r:embed="rId3">
-            <a:extLst>
-              <a:ext uri="{28A0092B-C50C-407E-A947-70E740481C1C}">
-                <a14:useLocalDpi xmlns:a14="http://schemas.microsoft.com/office/drawing/2010/main" val="0"/>
-              </a:ext>
-            </a:extLst>
-          </a:blip>
-          <a:stretch>
-            <a:fillRect/>
-          </a:stretch>
-        </p:blipFill>
-        <p:spPr>
-          <a:xfrm>
-            <a:off x="152400" y="1342816"/>
-            <a:ext cx="11734800" cy="4976106"/>
-          </a:xfrm>
-        </p:spPr>
-      </p:pic>
-    </p:spTree>
-    <p:extLst>
-      <p:ext uri="{BB962C8B-B14F-4D97-AF65-F5344CB8AC3E}">
-        <p14:creationId xmlns:p14="http://schemas.microsoft.com/office/powerpoint/2010/main" val="223380621"/>
-      </p:ext>
-    </p:extLst>
-  </p:cSld>
-  <p:clrMapOvr>
-    <a:masterClrMapping/>
-  </p:clrMapOvr>
-</p:sld>
-</file>
-
-<file path=ppt/slides/slide40.xml><?xml version="1.0" encoding="utf-8"?>
+<file path=ppt/slides/slide42.xml><?xml version="1.0" encoding="utf-8"?>
 <p:sld xmlns:a="http://schemas.openxmlformats.org/drawingml/2006/main" xmlns:r="http://schemas.openxmlformats.org/officeDocument/2006/relationships" xmlns:p="http://schemas.openxmlformats.org/presentationml/2006/main">
   <p:cSld>
     <p:spTree>
@@ -12675,7 +13374,7 @@
             <a:fld id="{17E04E7E-C2A2-4357-ABA7-0779A9EE9F17}" type="slidenum">
               <a:rPr lang="en-US" smtClean="0"/>
               <a:pPr/>
-              <a:t>40</a:t>
+              <a:t>42</a:t>
             </a:fld>
             <a:endParaRPr lang="en-US"/>
           </a:p>
@@ -12694,7 +13393,7 @@
 </p:sld>
 </file>
 
-<file path=ppt/slides/slide41.xml><?xml version="1.0" encoding="utf-8"?>
+<file path=ppt/slides/slide43.xml><?xml version="1.0" encoding="utf-8"?>
 <p:sld xmlns:a="http://schemas.openxmlformats.org/drawingml/2006/main" xmlns:r="http://schemas.openxmlformats.org/officeDocument/2006/relationships" xmlns:p="http://schemas.openxmlformats.org/presentationml/2006/main">
   <p:cSld>
     <p:spTree>
@@ -12812,7 +13511,7 @@
             <a:fld id="{17E04E7E-C2A2-4357-ABA7-0779A9EE9F17}" type="slidenum">
               <a:rPr lang="en-US" smtClean="0"/>
               <a:pPr/>
-              <a:t>41</a:t>
+              <a:t>43</a:t>
             </a:fld>
             <a:endParaRPr lang="en-US"/>
           </a:p>
@@ -12831,7 +13530,7 @@
 </p:sld>
 </file>
 
-<file path=ppt/slides/slide42.xml><?xml version="1.0" encoding="utf-8"?>
+<file path=ppt/slides/slide44.xml><?xml version="1.0" encoding="utf-8"?>
 <p:sld xmlns:a="http://schemas.openxmlformats.org/drawingml/2006/main" xmlns:r="http://schemas.openxmlformats.org/officeDocument/2006/relationships" xmlns:p="http://schemas.openxmlformats.org/presentationml/2006/main">
   <p:cSld>
     <p:spTree>
@@ -12978,7 +13677,7 @@
             <a:fld id="{CFF8E9C2-617A-4D65-AFBD-F489864C0492}" type="slidenum">
               <a:rPr lang="en-US" smtClean="0"/>
               <a:pPr/>
-              <a:t>42</a:t>
+              <a:t>44</a:t>
             </a:fld>
             <a:endParaRPr lang="en-US"/>
           </a:p>
@@ -13125,7 +13824,7 @@
 </p:sld>
 </file>
 
-<file path=ppt/slides/slide43.xml><?xml version="1.0" encoding="utf-8"?>
+<file path=ppt/slides/slide45.xml><?xml version="1.0" encoding="utf-8"?>
 <p:sld xmlns:a="http://schemas.openxmlformats.org/drawingml/2006/main" xmlns:r="http://schemas.openxmlformats.org/officeDocument/2006/relationships" xmlns:p="http://schemas.openxmlformats.org/presentationml/2006/main">
   <p:cSld>
     <p:spTree>
@@ -13413,7 +14112,7 @@
 </p:sld>
 </file>
 
-<file path=ppt/slides/slide44.xml><?xml version="1.0" encoding="utf-8"?>
+<file path=ppt/slides/slide46.xml><?xml version="1.0" encoding="utf-8"?>
 <p:sld xmlns:a="http://schemas.openxmlformats.org/drawingml/2006/main" xmlns:r="http://schemas.openxmlformats.org/officeDocument/2006/relationships" xmlns:p="http://schemas.openxmlformats.org/presentationml/2006/main">
   <p:cSld>
     <p:spTree>
@@ -13548,7 +14247,7 @@
             <a:fld id="{CFF8E9C2-617A-4D65-AFBD-F489864C0492}" type="slidenum">
               <a:rPr lang="en-US" smtClean="0"/>
               <a:pPr/>
-              <a:t>44</a:t>
+              <a:t>46</a:t>
             </a:fld>
             <a:endParaRPr lang="en-US"/>
           </a:p>
@@ -13891,7 +14590,7 @@
 </p:sld>
 </file>
 
-<file path=ppt/slides/slide45.xml><?xml version="1.0" encoding="utf-8"?>
+<file path=ppt/slides/slide47.xml><?xml version="1.0" encoding="utf-8"?>
 <p:sld xmlns:a="http://schemas.openxmlformats.org/drawingml/2006/main" xmlns:r="http://schemas.openxmlformats.org/officeDocument/2006/relationships" xmlns:p="http://schemas.openxmlformats.org/presentationml/2006/main">
   <p:cSld>
     <p:spTree>
@@ -13998,7 +14697,7 @@
             <a:fld id="{17E04E7E-C2A2-4357-ABA7-0779A9EE9F17}" type="slidenum">
               <a:rPr lang="en-US" smtClean="0"/>
               <a:pPr/>
-              <a:t>45</a:t>
+              <a:t>47</a:t>
             </a:fld>
             <a:endParaRPr lang="en-US"/>
           </a:p>
@@ -14017,7 +14716,7 @@
 </p:sld>
 </file>
 
-<file path=ppt/slides/slide46.xml><?xml version="1.0" encoding="utf-8"?>
+<file path=ppt/slides/slide48.xml><?xml version="1.0" encoding="utf-8"?>
 <p:sld xmlns:a="http://schemas.openxmlformats.org/drawingml/2006/main" xmlns:r="http://schemas.openxmlformats.org/officeDocument/2006/relationships" xmlns:p="http://schemas.openxmlformats.org/presentationml/2006/main">
   <p:cSld>
     <p:spTree>
@@ -14145,7 +14844,7 @@
             <a:fld id="{17E04E7E-C2A2-4357-ABA7-0779A9EE9F17}" type="slidenum">
               <a:rPr lang="en-US" smtClean="0"/>
               <a:pPr/>
-              <a:t>46</a:t>
+              <a:t>48</a:t>
             </a:fld>
             <a:endParaRPr lang="en-US"/>
           </a:p>
@@ -14305,7 +15004,7 @@
 </p:sld>
 </file>
 
-<file path=ppt/slides/slide47.xml><?xml version="1.0" encoding="utf-8"?>
+<file path=ppt/slides/slide49.xml><?xml version="1.0" encoding="utf-8"?>
 <p:sld xmlns:a="http://schemas.openxmlformats.org/drawingml/2006/main" xmlns:r="http://schemas.openxmlformats.org/officeDocument/2006/relationships" xmlns:p="http://schemas.openxmlformats.org/presentationml/2006/main">
   <p:cSld>
     <p:spTree>
@@ -14432,7 +15131,7 @@
             <a:fld id="{17E04E7E-C2A2-4357-ABA7-0779A9EE9F17}" type="slidenum">
               <a:rPr lang="en-US" smtClean="0"/>
               <a:pPr/>
-              <a:t>47</a:t>
+              <a:t>49</a:t>
             </a:fld>
             <a:endParaRPr lang="en-US"/>
           </a:p>
@@ -14561,7 +15260,7 @@
 </p:sld>
 </file>
 
-<file path=ppt/slides/slide48.xml><?xml version="1.0" encoding="utf-8"?>
+<file path=ppt/slides/slide5.xml><?xml version="1.0" encoding="utf-8"?>
 <p:sld xmlns:a="http://schemas.openxmlformats.org/drawingml/2006/main" xmlns:r="http://schemas.openxmlformats.org/officeDocument/2006/relationships" xmlns:p="http://schemas.openxmlformats.org/presentationml/2006/main">
   <p:cSld>
     <p:spTree>
@@ -14590,6 +15289,156 @@
         </p:nvSpPr>
         <p:spPr/>
         <p:txBody>
+          <a:bodyPr>
+            <a:normAutofit/>
+          </a:bodyPr>
+          <a:lstStyle/>
+          <a:p>
+            <a:r>
+              <a:rPr lang="en-US" dirty="0"/>
+              <a:t>Unemployment Rate – Very Long View</a:t>
+            </a:r>
+          </a:p>
+        </p:txBody>
+      </p:sp>
+      <p:sp>
+        <p:nvSpPr>
+          <p:cNvPr id="4" name="Slide Number Placeholder 3"/>
+          <p:cNvSpPr>
+            <a:spLocks noGrp="1"/>
+          </p:cNvSpPr>
+          <p:nvPr>
+            <p:ph type="sldNum" sz="quarter" idx="12"/>
+          </p:nvPr>
+        </p:nvSpPr>
+        <p:spPr/>
+        <p:txBody>
+          <a:bodyPr/>
+          <a:lstStyle/>
+          <a:p>
+            <a:fld id="{17E04E7E-C2A2-4357-ABA7-0779A9EE9F17}" type="slidenum">
+              <a:rPr lang="en-US" smtClean="0"/>
+              <a:pPr/>
+              <a:t>5</a:t>
+            </a:fld>
+            <a:endParaRPr lang="en-US"/>
+          </a:p>
+        </p:txBody>
+      </p:sp>
+      <p:sp>
+        <p:nvSpPr>
+          <p:cNvPr id="6" name="TextBox 5"/>
+          <p:cNvSpPr txBox="1"/>
+          <p:nvPr/>
+        </p:nvSpPr>
+        <p:spPr>
+          <a:xfrm>
+            <a:off x="3002282" y="6310631"/>
+            <a:ext cx="6141719" cy="369332"/>
+          </a:xfrm>
+          <a:prstGeom prst="rect">
+            <a:avLst/>
+          </a:prstGeom>
+          <a:noFill/>
+        </p:spPr>
+        <p:txBody>
+          <a:bodyPr wrap="square" rtlCol="0">
+            <a:spAutoFit/>
+          </a:bodyPr>
+          <a:lstStyle/>
+          <a:p>
+            <a:r>
+              <a:rPr lang="en-US" dirty="0"/>
+              <a:t>Source: BLS and </a:t>
+            </a:r>
+            <a:r>
+              <a:rPr lang="en-US" dirty="0" err="1"/>
+              <a:t>Petrosky</a:t>
+            </a:r>
+            <a:r>
+              <a:rPr lang="en-US" dirty="0"/>
+              <a:t>-Nadeau and Zhang (2020)</a:t>
+            </a:r>
+          </a:p>
+        </p:txBody>
+      </p:sp>
+      <p:pic>
+        <p:nvPicPr>
+          <p:cNvPr id="8" name="Content Placeholder 7" descr="A graph showing the growth of the stock market&#10;&#10;AI-generated content may be incorrect.">
+            <a:extLst>
+              <a:ext uri="{FF2B5EF4-FFF2-40B4-BE49-F238E27FC236}">
+                <a16:creationId xmlns:a16="http://schemas.microsoft.com/office/drawing/2014/main" id="{9978E0C4-6C3D-9912-190D-2E2FCD2F14E5}"/>
+              </a:ext>
+            </a:extLst>
+          </p:cNvPr>
+          <p:cNvPicPr>
+            <a:picLocks noGrp="1" noChangeAspect="1"/>
+          </p:cNvPicPr>
+          <p:nvPr>
+            <p:ph idx="1"/>
+          </p:nvPr>
+        </p:nvPicPr>
+        <p:blipFill>
+          <a:blip r:embed="rId2" cstate="print">
+            <a:extLst>
+              <a:ext uri="{28A0092B-C50C-407E-A947-70E740481C1C}">
+                <a14:useLocalDpi xmlns:a14="http://schemas.microsoft.com/office/drawing/2010/main" val="0"/>
+              </a:ext>
+            </a:extLst>
+          </a:blip>
+          <a:stretch>
+            <a:fillRect/>
+          </a:stretch>
+        </p:blipFill>
+        <p:spPr>
+          <a:xfrm>
+            <a:off x="1219200" y="1417638"/>
+            <a:ext cx="9753600" cy="4907170"/>
+          </a:xfrm>
+        </p:spPr>
+      </p:pic>
+    </p:spTree>
+    <p:extLst>
+      <p:ext uri="{BB962C8B-B14F-4D97-AF65-F5344CB8AC3E}">
+        <p14:creationId xmlns:p14="http://schemas.microsoft.com/office/powerpoint/2010/main" val="2219251988"/>
+      </p:ext>
+    </p:extLst>
+  </p:cSld>
+  <p:clrMapOvr>
+    <a:masterClrMapping/>
+  </p:clrMapOvr>
+</p:sld>
+</file>
+
+<file path=ppt/slides/slide50.xml><?xml version="1.0" encoding="utf-8"?>
+<p:sld xmlns:a="http://schemas.openxmlformats.org/drawingml/2006/main" xmlns:r="http://schemas.openxmlformats.org/officeDocument/2006/relationships" xmlns:p="http://schemas.openxmlformats.org/presentationml/2006/main">
+  <p:cSld>
+    <p:spTree>
+      <p:nvGrpSpPr>
+        <p:cNvPr id="1" name=""/>
+        <p:cNvGrpSpPr/>
+        <p:nvPr/>
+      </p:nvGrpSpPr>
+      <p:grpSpPr>
+        <a:xfrm>
+          <a:off x="0" y="0"/>
+          <a:ext cx="0" cy="0"/>
+          <a:chOff x="0" y="0"/>
+          <a:chExt cx="0" cy="0"/>
+        </a:xfrm>
+      </p:grpSpPr>
+      <p:sp>
+        <p:nvSpPr>
+          <p:cNvPr id="2" name="Title 1"/>
+          <p:cNvSpPr>
+            <a:spLocks noGrp="1"/>
+          </p:cNvSpPr>
+          <p:nvPr>
+            <p:ph type="title"/>
+          </p:nvPr>
+        </p:nvSpPr>
+        <p:spPr/>
+        <p:txBody>
           <a:bodyPr/>
           <a:lstStyle/>
           <a:p>
@@ -14674,7 +15523,7 @@
             <a:fld id="{17E04E7E-C2A2-4357-ABA7-0779A9EE9F17}" type="slidenum">
               <a:rPr lang="en-US" smtClean="0"/>
               <a:pPr/>
-              <a:t>48</a:t>
+              <a:t>50</a:t>
             </a:fld>
             <a:endParaRPr lang="en-US"/>
           </a:p>
@@ -14834,156 +15683,6 @@
 </p:sld>
 </file>
 
-<file path=ppt/slides/slide5.xml><?xml version="1.0" encoding="utf-8"?>
-<p:sld xmlns:a="http://schemas.openxmlformats.org/drawingml/2006/main" xmlns:r="http://schemas.openxmlformats.org/officeDocument/2006/relationships" xmlns:p="http://schemas.openxmlformats.org/presentationml/2006/main">
-  <p:cSld>
-    <p:spTree>
-      <p:nvGrpSpPr>
-        <p:cNvPr id="1" name=""/>
-        <p:cNvGrpSpPr/>
-        <p:nvPr/>
-      </p:nvGrpSpPr>
-      <p:grpSpPr>
-        <a:xfrm>
-          <a:off x="0" y="0"/>
-          <a:ext cx="0" cy="0"/>
-          <a:chOff x="0" y="0"/>
-          <a:chExt cx="0" cy="0"/>
-        </a:xfrm>
-      </p:grpSpPr>
-      <p:sp>
-        <p:nvSpPr>
-          <p:cNvPr id="2" name="Title 1"/>
-          <p:cNvSpPr>
-            <a:spLocks noGrp="1"/>
-          </p:cNvSpPr>
-          <p:nvPr>
-            <p:ph type="title"/>
-          </p:nvPr>
-        </p:nvSpPr>
-        <p:spPr/>
-        <p:txBody>
-          <a:bodyPr>
-            <a:normAutofit/>
-          </a:bodyPr>
-          <a:lstStyle/>
-          <a:p>
-            <a:r>
-              <a:rPr lang="en-US" dirty="0"/>
-              <a:t>Unemployment Rate – Very Long View</a:t>
-            </a:r>
-          </a:p>
-        </p:txBody>
-      </p:sp>
-      <p:sp>
-        <p:nvSpPr>
-          <p:cNvPr id="4" name="Slide Number Placeholder 3"/>
-          <p:cNvSpPr>
-            <a:spLocks noGrp="1"/>
-          </p:cNvSpPr>
-          <p:nvPr>
-            <p:ph type="sldNum" sz="quarter" idx="12"/>
-          </p:nvPr>
-        </p:nvSpPr>
-        <p:spPr/>
-        <p:txBody>
-          <a:bodyPr/>
-          <a:lstStyle/>
-          <a:p>
-            <a:fld id="{17E04E7E-C2A2-4357-ABA7-0779A9EE9F17}" type="slidenum">
-              <a:rPr lang="en-US" smtClean="0"/>
-              <a:pPr/>
-              <a:t>5</a:t>
-            </a:fld>
-            <a:endParaRPr lang="en-US"/>
-          </a:p>
-        </p:txBody>
-      </p:sp>
-      <p:sp>
-        <p:nvSpPr>
-          <p:cNvPr id="6" name="TextBox 5"/>
-          <p:cNvSpPr txBox="1"/>
-          <p:nvPr/>
-        </p:nvSpPr>
-        <p:spPr>
-          <a:xfrm>
-            <a:off x="3002282" y="6310631"/>
-            <a:ext cx="6141719" cy="369332"/>
-          </a:xfrm>
-          <a:prstGeom prst="rect">
-            <a:avLst/>
-          </a:prstGeom>
-          <a:noFill/>
-        </p:spPr>
-        <p:txBody>
-          <a:bodyPr wrap="square" rtlCol="0">
-            <a:spAutoFit/>
-          </a:bodyPr>
-          <a:lstStyle/>
-          <a:p>
-            <a:r>
-              <a:rPr lang="en-US" dirty="0"/>
-              <a:t>Source: BLS and </a:t>
-            </a:r>
-            <a:r>
-              <a:rPr lang="en-US" dirty="0" err="1"/>
-              <a:t>Petrosky</a:t>
-            </a:r>
-            <a:r>
-              <a:rPr lang="en-US" dirty="0"/>
-              <a:t>-Nadeau and Zhang (2020)</a:t>
-            </a:r>
-          </a:p>
-        </p:txBody>
-      </p:sp>
-      <p:pic>
-        <p:nvPicPr>
-          <p:cNvPr id="8" name="Content Placeholder 7" descr="A graph showing the growth of the stock market&#10;&#10;AI-generated content may be incorrect.">
-            <a:extLst>
-              <a:ext uri="{FF2B5EF4-FFF2-40B4-BE49-F238E27FC236}">
-                <a16:creationId xmlns:a16="http://schemas.microsoft.com/office/drawing/2014/main" id="{9978E0C4-6C3D-9912-190D-2E2FCD2F14E5}"/>
-              </a:ext>
-            </a:extLst>
-          </p:cNvPr>
-          <p:cNvPicPr>
-            <a:picLocks noGrp="1" noChangeAspect="1"/>
-          </p:cNvPicPr>
-          <p:nvPr>
-            <p:ph idx="1"/>
-          </p:nvPr>
-        </p:nvPicPr>
-        <p:blipFill>
-          <a:blip r:embed="rId2" cstate="print">
-            <a:extLst>
-              <a:ext uri="{28A0092B-C50C-407E-A947-70E740481C1C}">
-                <a14:useLocalDpi xmlns:a14="http://schemas.microsoft.com/office/drawing/2010/main" val="0"/>
-              </a:ext>
-            </a:extLst>
-          </a:blip>
-          <a:stretch>
-            <a:fillRect/>
-          </a:stretch>
-        </p:blipFill>
-        <p:spPr>
-          <a:xfrm>
-            <a:off x="1219200" y="1417638"/>
-            <a:ext cx="9753600" cy="4907170"/>
-          </a:xfrm>
-        </p:spPr>
-      </p:pic>
-    </p:spTree>
-    <p:extLst>
-      <p:ext uri="{BB962C8B-B14F-4D97-AF65-F5344CB8AC3E}">
-        <p14:creationId xmlns:p14="http://schemas.microsoft.com/office/powerpoint/2010/main" val="2219251988"/>
-      </p:ext>
-    </p:extLst>
-  </p:cSld>
-  <p:clrMapOvr>
-    <a:masterClrMapping/>
-  </p:clrMapOvr>
-</p:sld>
-</file>
-
 <file path=ppt/slides/slide6.xml><?xml version="1.0" encoding="utf-8"?>
 <p:sld xmlns:a="http://schemas.openxmlformats.org/drawingml/2006/main" xmlns:r="http://schemas.openxmlformats.org/officeDocument/2006/relationships" xmlns:p="http://schemas.openxmlformats.org/presentationml/2006/main">
   <p:cSld>
@@ -15049,10 +15748,10 @@
       </p:sp>
       <p:pic>
         <p:nvPicPr>
-          <p:cNvPr id="9" name="Content Placeholder 8" descr="A graph showing a line&#10;&#10;AI-generated content may be incorrect.">
+          <p:cNvPr id="7" name="Content Placeholder 6">
             <a:extLst>
               <a:ext uri="{FF2B5EF4-FFF2-40B4-BE49-F238E27FC236}">
-                <a16:creationId xmlns:a16="http://schemas.microsoft.com/office/drawing/2014/main" id="{F3AA0563-14DF-33C9-116E-10567DED35AB}"/>
+                <a16:creationId xmlns:a16="http://schemas.microsoft.com/office/drawing/2014/main" id="{8C13F529-470E-B7EE-99F9-7B18CE593502}"/>
               </a:ext>
             </a:extLst>
           </p:cNvPr>
@@ -15077,9 +15776,12 @@
         </p:blipFill>
         <p:spPr>
           <a:xfrm>
-            <a:off x="243201" y="1417638"/>
-            <a:ext cx="11705598" cy="4840145"/>
+            <a:off x="381000" y="1305807"/>
+            <a:ext cx="11430000" cy="5114749"/>
           </a:xfrm>
+          <a:prstGeom prst="rect">
+            <a:avLst/>
+          </a:prstGeom>
         </p:spPr>
       </p:pic>
     </p:spTree>
@@ -15160,10 +15862,10 @@
       </p:sp>
       <p:pic>
         <p:nvPicPr>
-          <p:cNvPr id="8" name="Content Placeholder 7" descr="A graph on a white background&#10;&#10;AI-generated content may be incorrect.">
+          <p:cNvPr id="7" name="Content Placeholder 6">
             <a:extLst>
               <a:ext uri="{FF2B5EF4-FFF2-40B4-BE49-F238E27FC236}">
-                <a16:creationId xmlns:a16="http://schemas.microsoft.com/office/drawing/2014/main" id="{B4D7114F-B519-CB53-AFFB-1300D9FBD71E}"/>
+                <a16:creationId xmlns:a16="http://schemas.microsoft.com/office/drawing/2014/main" id="{1AE7B8BF-6260-0B19-E6B2-02CDF2985D6C}"/>
               </a:ext>
             </a:extLst>
           </p:cNvPr>
@@ -15188,9 +15890,12 @@
         </p:blipFill>
         <p:spPr>
           <a:xfrm>
-            <a:off x="213343" y="1417638"/>
-            <a:ext cx="11765313" cy="4816209"/>
+            <a:off x="228600" y="1227780"/>
+            <a:ext cx="11582399" cy="5202351"/>
           </a:xfrm>
+          <a:prstGeom prst="rect">
+            <a:avLst/>
+          </a:prstGeom>
         </p:spPr>
       </p:pic>
     </p:spTree>
@@ -15302,7 +16007,7 @@
           <a:p>
             <a:r>
               <a:rPr lang="en-US" dirty="0"/>
-              <a:t>Core CPI Inflation in June 2025: 3.0%</a:t>
+              <a:t>Core CPI Inflation in June 2025: 2.5%</a:t>
             </a:r>
           </a:p>
           <a:p>
@@ -15315,10 +16020,10 @@
       </p:sp>
       <p:pic>
         <p:nvPicPr>
-          <p:cNvPr id="8" name="Content Placeholder 7" descr="A graph showing a line&#10;&#10;AI-generated content may be incorrect.">
+          <p:cNvPr id="9" name="Content Placeholder 8">
             <a:extLst>
               <a:ext uri="{FF2B5EF4-FFF2-40B4-BE49-F238E27FC236}">
-                <a16:creationId xmlns:a16="http://schemas.microsoft.com/office/drawing/2014/main" id="{28F749C4-1C1F-1C58-AC90-0CE224A68DDF}"/>
+                <a16:creationId xmlns:a16="http://schemas.microsoft.com/office/drawing/2014/main" id="{8B19666B-D0C4-141A-8C3D-CA1FDE0D5843}"/>
               </a:ext>
             </a:extLst>
           </p:cNvPr>
@@ -15343,9 +16048,12 @@
         </p:blipFill>
         <p:spPr>
           <a:xfrm>
-            <a:off x="386569" y="1417638"/>
-            <a:ext cx="11418861" cy="4664982"/>
+            <a:off x="609600" y="1329760"/>
+            <a:ext cx="10896600" cy="4913587"/>
           </a:xfrm>
+          <a:prstGeom prst="rect">
+            <a:avLst/>
+          </a:prstGeom>
         </p:spPr>
       </p:pic>
     </p:spTree>
@@ -15426,10 +16134,10 @@
       </p:sp>
       <p:pic>
         <p:nvPicPr>
-          <p:cNvPr id="8" name="Content Placeholder 7" descr="A graph showing a line&#10;&#10;AI-generated content may be incorrect.">
+          <p:cNvPr id="7" name="Content Placeholder 6">
             <a:extLst>
               <a:ext uri="{FF2B5EF4-FFF2-40B4-BE49-F238E27FC236}">
-                <a16:creationId xmlns:a16="http://schemas.microsoft.com/office/drawing/2014/main" id="{1A3601E7-A36E-B323-0E5D-51BC6C4EF5AB}"/>
+                <a16:creationId xmlns:a16="http://schemas.microsoft.com/office/drawing/2014/main" id="{F4985AF9-3DAA-DFE4-899F-E9343E7D0660}"/>
               </a:ext>
             </a:extLst>
           </p:cNvPr>
@@ -15454,9 +16162,12 @@
         </p:blipFill>
         <p:spPr>
           <a:xfrm>
-            <a:off x="156324" y="1417638"/>
-            <a:ext cx="11732831" cy="4830761"/>
+            <a:off x="304800" y="1238724"/>
+            <a:ext cx="11430000" cy="5179850"/>
           </a:xfrm>
+          <a:prstGeom prst="rect">
+            <a:avLst/>
+          </a:prstGeom>
         </p:spPr>
       </p:pic>
     </p:spTree>
